--- a/ClassInstructions.pptx
+++ b/ClassInstructions.pptx
@@ -259,7 +259,7 @@
           <a:p>
             <a:fld id="{1AE07847-C61E-4DF4-BB44-A79CD41A3629}" type="datetimeFigureOut">
               <a:rPr lang="en-US" smtClean="0"/>
-              <a:t>9/7/2025</a:t>
+              <a:t>9/21/2026</a:t>
             </a:fld>
             <a:endParaRPr lang="en-US"/>
           </a:p>
@@ -457,7 +457,7 @@
           <a:p>
             <a:fld id="{1AE07847-C61E-4DF4-BB44-A79CD41A3629}" type="datetimeFigureOut">
               <a:rPr lang="en-US" smtClean="0"/>
-              <a:t>9/7/2025</a:t>
+              <a:t>9/21/2026</a:t>
             </a:fld>
             <a:endParaRPr lang="en-US"/>
           </a:p>
@@ -665,7 +665,7 @@
           <a:p>
             <a:fld id="{1AE07847-C61E-4DF4-BB44-A79CD41A3629}" type="datetimeFigureOut">
               <a:rPr lang="en-US" smtClean="0"/>
-              <a:t>9/7/2025</a:t>
+              <a:t>9/21/2026</a:t>
             </a:fld>
             <a:endParaRPr lang="en-US"/>
           </a:p>
@@ -863,7 +863,7 @@
           <a:p>
             <a:fld id="{1AE07847-C61E-4DF4-BB44-A79CD41A3629}" type="datetimeFigureOut">
               <a:rPr lang="en-US" smtClean="0"/>
-              <a:t>9/7/2025</a:t>
+              <a:t>9/21/2026</a:t>
             </a:fld>
             <a:endParaRPr lang="en-US"/>
           </a:p>
@@ -1138,7 +1138,7 @@
           <a:p>
             <a:fld id="{1AE07847-C61E-4DF4-BB44-A79CD41A3629}" type="datetimeFigureOut">
               <a:rPr lang="en-US" smtClean="0"/>
-              <a:t>9/7/2025</a:t>
+              <a:t>9/21/2026</a:t>
             </a:fld>
             <a:endParaRPr lang="en-US"/>
           </a:p>
@@ -1403,7 +1403,7 @@
           <a:p>
             <a:fld id="{1AE07847-C61E-4DF4-BB44-A79CD41A3629}" type="datetimeFigureOut">
               <a:rPr lang="en-US" smtClean="0"/>
-              <a:t>9/7/2025</a:t>
+              <a:t>9/21/2026</a:t>
             </a:fld>
             <a:endParaRPr lang="en-US"/>
           </a:p>
@@ -1815,7 +1815,7 @@
           <a:p>
             <a:fld id="{1AE07847-C61E-4DF4-BB44-A79CD41A3629}" type="datetimeFigureOut">
               <a:rPr lang="en-US" smtClean="0"/>
-              <a:t>9/7/2025</a:t>
+              <a:t>9/21/2026</a:t>
             </a:fld>
             <a:endParaRPr lang="en-US"/>
           </a:p>
@@ -1956,7 +1956,7 @@
           <a:p>
             <a:fld id="{1AE07847-C61E-4DF4-BB44-A79CD41A3629}" type="datetimeFigureOut">
               <a:rPr lang="en-US" smtClean="0"/>
-              <a:t>9/7/2025</a:t>
+              <a:t>9/21/2026</a:t>
             </a:fld>
             <a:endParaRPr lang="en-US"/>
           </a:p>
@@ -2069,7 +2069,7 @@
           <a:p>
             <a:fld id="{1AE07847-C61E-4DF4-BB44-A79CD41A3629}" type="datetimeFigureOut">
               <a:rPr lang="en-US" smtClean="0"/>
-              <a:t>9/7/2025</a:t>
+              <a:t>9/21/2026</a:t>
             </a:fld>
             <a:endParaRPr lang="en-US"/>
           </a:p>
@@ -2380,7 +2380,7 @@
           <a:p>
             <a:fld id="{1AE07847-C61E-4DF4-BB44-A79CD41A3629}" type="datetimeFigureOut">
               <a:rPr lang="en-US" smtClean="0"/>
-              <a:t>9/7/2025</a:t>
+              <a:t>9/21/2026</a:t>
             </a:fld>
             <a:endParaRPr lang="en-US"/>
           </a:p>
@@ -2668,7 +2668,7 @@
           <a:p>
             <a:fld id="{1AE07847-C61E-4DF4-BB44-A79CD41A3629}" type="datetimeFigureOut">
               <a:rPr lang="en-US" smtClean="0"/>
-              <a:t>9/7/2025</a:t>
+              <a:t>9/21/2026</a:t>
             </a:fld>
             <a:endParaRPr lang="en-US"/>
           </a:p>
@@ -2909,7 +2909,7 @@
           <a:p>
             <a:fld id="{1AE07847-C61E-4DF4-BB44-A79CD41A3629}" type="datetimeFigureOut">
               <a:rPr lang="en-US" smtClean="0"/>
-              <a:t>9/7/2025</a:t>
+              <a:t>9/21/2026</a:t>
             </a:fld>
             <a:endParaRPr lang="en-US"/>
           </a:p>
@@ -3340,7 +3340,7 @@
         </p:nvSpPr>
         <p:spPr>
           <a:xfrm>
-            <a:off x="241950" y="1567580"/>
+            <a:off x="241950" y="1348124"/>
             <a:ext cx="11708100" cy="4524315"/>
           </a:xfrm>
           <a:prstGeom prst="rect">
@@ -3365,7 +3365,17 @@
           <a:p>
             <a:r>
               <a:rPr lang="en-US" dirty="0"/>
-              <a:t>In the 1st class we will get to know R and RStudio via the presentation in "AQuikIntro2RandRStudioInQuarto.html“ (if in class this will be delivered by the teacher)</a:t>
+              <a:t>In the 1st class we will get to know R and RStudio via the presentation in "</a:t>
+            </a:r>
+            <a:r>
+              <a:rPr lang="en-US" dirty="0">
+                <a:hlinkClick r:id="rId2"/>
+              </a:rPr>
+              <a:t>AQuikIntro2RandRStudioInQuarto.html</a:t>
+            </a:r>
+            <a:r>
+              <a:rPr lang="en-US" dirty="0"/>
+              <a:t>“ (if in class this will be delivered by the teacher)</a:t>
             </a:r>
           </a:p>
           <a:p>
@@ -3382,7 +3392,7 @@
             </a:r>
             <a:r>
               <a:rPr lang="en-US" dirty="0"/>
-              <a:t>, which produced the .pdf, .html and .docx. Perhaps is best to work via the "TAMsIntro2RviaRStudioTutorial.pdf". </a:t>
+              <a:t>, which produced the .pdf, .html and .docx. Perhaps is best to work via the "TAMsIntro2RviaRStudioTutorial.pdf“ or “TAMsIntro2RviaRStudioTutorial.html”. </a:t>
             </a:r>
           </a:p>
           <a:p>
@@ -3400,15 +3410,24 @@
           <a:p>
             <a:r>
               <a:rPr lang="en-US" dirty="0"/>
-              <a:t>You will try to see for yourself the usefulness of dynamic reports in R Markdown with the material on folder "</a:t>
+              <a:t>Continue working through the "TAMsIntro2RviaRStudioTutorial.pdf". </a:t>
+            </a:r>
+          </a:p>
+          <a:p>
+            <a:endParaRPr lang="en-US" dirty="0"/>
+          </a:p>
+          <a:p>
+            <a:r>
+              <a:rPr lang="en-US" dirty="0"/>
+              <a:t>You will try to see for yourself the usefulness of dynamic reports in R Markdown with the material on folder "Examples/</a:t>
             </a:r>
             <a:r>
               <a:rPr lang="en-US" dirty="0" err="1"/>
-              <a:t>ExampleDataAnalysis</a:t>
+              <a:t>DynamicReproductibleDataAnalysis</a:t>
             </a:r>
             <a:r>
               <a:rPr lang="en-US" dirty="0"/>
-              <a:t>", using file "</a:t>
+              <a:t>/</a:t>
             </a:r>
             <a:r>
               <a:rPr lang="en-US" dirty="0" err="1"/>
@@ -3418,32 +3437,10 @@
               <a:rPr lang="en-US" dirty="0"/>
               <a:t>".</a:t>
             </a:r>
-          </a:p>
-          <a:p>
             <a:br>
               <a:rPr lang="en-US" dirty="0"/>
             </a:br>
-            <a:r>
-              <a:rPr lang="en-US" dirty="0"/>
-              <a:t>Continue working through the "TAMsIntro2RviaRStudioTutorial.pdf". </a:t>
-            </a:r>
-          </a:p>
-          <a:p>
             <a:endParaRPr lang="en-US" dirty="0"/>
-          </a:p>
-          <a:p>
-            <a:r>
-              <a:rPr lang="en-US" dirty="0"/>
-              <a:t>Finally, if you completed all this you can play with some additional resources in folder "</a:t>
-            </a:r>
-            <a:r>
-              <a:rPr lang="en-US" dirty="0" err="1"/>
-              <a:t>Adicional</a:t>
-            </a:r>
-            <a:r>
-              <a:rPr lang="en-US" dirty="0"/>
-              <a:t>".</a:t>
-            </a:r>
           </a:p>
         </p:txBody>
       </p:sp>
@@ -3461,7 +3458,7 @@
         </p:nvSpPr>
         <p:spPr>
           <a:xfrm>
-            <a:off x="1429900" y="565154"/>
+            <a:off x="1429900" y="354842"/>
             <a:ext cx="9021262" cy="584775"/>
           </a:xfrm>
           <a:prstGeom prst="rect">
